--- a/poster-slides/templates/36x48_horizontal_poster.pptx
+++ b/poster-slides/templates/36x48_horizontal_poster.pptx
@@ -4775,9 +4775,93 @@
           <a:chExt cx="0" cy="0"/>
         </a:xfrm>
       </p:grpSpPr>
+      <p:sp>
+        <p:nvSpPr>
+          <p:cNvPr id="5" name="Accessible slide title"/>
+          <p:cNvSpPr/>
+          <p:nvPr>
+            <p:ph type="title"/>
+          </p:nvPr>
+        </p:nvSpPr>
+        <p:spPr>
+          <a:xfrm>
+            <a:off x="0" y="-914400"/>
+            <a:ext cx="20000000" cy="457200"/>
+          </a:xfrm>
+          <a:noFill/>
+        </p:spPr>
+        <p:txBody>
+          <a:bodyPr/>
+          <a:lstStyle/>
+          <a:p>
+            <a:r>
+              <a:rPr lang="en-US" sz="2000"/>
+              <a:t>36x48 horizontal poster template — instructions</a:t>
+            </a:r>
+          </a:p>
+        </p:txBody>
+      </p:sp>
+      <p:sp>
+        <p:nvSpPr>
+          <p:cNvPr id="6" name="Template instructions — accessible text equivalent"/>
+          <p:cNvSpPr/>
+          <p:nvPr/>
+        </p:nvSpPr>
+        <p:spPr>
+          <a:xfrm>
+            <a:off x="0" y="-20000000"/>
+            <a:ext cx="20000000" cy="18000000"/>
+          </a:xfrm>
+          <a:noFill/>
+        </p:spPr>
+        <p:txBody>
+          <a:bodyPr/>
+          <a:lstStyle/>
+          <a:p>
+            <a:r>
+              <a:t>This template is inspired by the #evenbetterpostertemplate and work by the MIT-BECL lab. </a:t>
+            </a:r>
+          </a:p>
+          <a:p>
+            <a:r>
+              <a:t>This default font for this template is Atkinson Hyperlegible which is designed to be accessible for low-vision readers. You may need to download and install the font on your device. Or you can select a font that is compatible with all Microsoft office products. </a:t>
+            </a:r>
+          </a:p>
+          <a:p>
+            <a:r>
+              <a:t>UNL’s color pallet is built into the template color theme.</a:t>
+            </a:r>
+          </a:p>
+          <a:p>
+            <a:r>
+              <a:t>You can change the background color in the Slide Master. </a:t>
+            </a:r>
+          </a:p>
+          <a:p>
+            <a:r>
+              <a:t>You also need to make your own QRC code or delete it on the Slide Master. </a:t>
+            </a:r>
+          </a:p>
+          <a:p>
+            <a:r>
+              <a:t>When inserting a graph, chart, table, etc., it will automatically be styled according to brand standards. To adjust colors, use the built-in color theme.</a:t>
+            </a:r>
+          </a:p>
+          <a:p>
+            <a:r>
+              <a:t>You can copy and paste UNL’s Law-Psych Program &amp; University logos from here below.</a:t>
+            </a:r>
+          </a:p>
+          <a:p>
+            <a:r>
+              <a:t>This slide is just for context and to help you use the template.</a:t>
+            </a:r>
+          </a:p>
+        </p:txBody>
+      </p:sp>
       <p:pic>
         <p:nvPicPr>
-          <p:cNvPr id="3" name="Picture 2" descr="A black and red logo&#10;&#10;Description automatically generated">
+          <p:cNvPr id="3" name="Picture 2" descr="University of Nebraska–Lincoln Law-Psychology Program logo.">
             <a:extLst>
               <a:ext uri="{FF2B5EF4-FFF2-40B4-BE49-F238E27FC236}">
                 <a16:creationId xmlns:a16="http://schemas.microsoft.com/office/drawing/2014/main" id="{CFCEA475-814C-ADA9-2255-BA87258FE0B5}"/>
@@ -4807,7 +4891,7 @@
       </p:pic>
       <p:pic>
         <p:nvPicPr>
-          <p:cNvPr id="4" name="Picture 3" descr="A red and white symbol with a black background&#10;&#10;Description automatically generated">
+          <p:cNvPr id="4" name="Picture 3" descr="University of Nebraska–Lincoln logo.">
             <a:extLst>
               <a:ext uri="{FF2B5EF4-FFF2-40B4-BE49-F238E27FC236}">
                 <a16:creationId xmlns:a16="http://schemas.microsoft.com/office/drawing/2014/main" id="{4892FDDB-EDCF-EC93-F114-95C817CF815C}"/>
@@ -4867,7 +4951,35 @@
       </p:grpSpPr>
       <p:sp>
         <p:nvSpPr>
-          <p:cNvPr id="2" name="Picture Placeholder 1">
+          <p:cNvPr id="24" name="Title 23">
+            <a:extLst>
+              <a:ext uri="{FF2B5EF4-FFF2-40B4-BE49-F238E27FC236}">
+                <a16:creationId xmlns:a16="http://schemas.microsoft.com/office/drawing/2014/main" id="{8B2ED90E-31D2-2E36-5570-A4AB2529320E}"/>
+              </a:ext>
+            </a:extLst>
+          </p:cNvPr>
+          <p:cNvSpPr>
+            <a:spLocks noGrp="1"/>
+          </p:cNvSpPr>
+          <p:nvPr>
+            <p:ph type="title"/>
+          </p:nvPr>
+        </p:nvSpPr>
+        <p:spPr/>
+        <p:txBody>
+          <a:bodyPr/>
+          <a:lstStyle/>
+          <a:p>
+            <a:r>
+              <a:rPr lang="en-US"/>
+              <a:t>36x48 horizontal poster template — layout 1</a:t>
+            </a:r>
+          </a:p>
+        </p:txBody>
+      </p:sp>
+      <p:sp>
+        <p:nvSpPr>
+          <p:cNvPr id="2" name="Logo or QRC">
             <a:extLst>
               <a:ext uri="{FF2B5EF4-FFF2-40B4-BE49-F238E27FC236}">
                 <a16:creationId xmlns:a16="http://schemas.microsoft.com/office/drawing/2014/main" id="{B1F7372E-E845-0ADD-F946-97EE77F6E130}"/>
@@ -4892,7 +5004,57 @@
       </p:sp>
       <p:sp>
         <p:nvSpPr>
-          <p:cNvPr id="3" name="Content Placeholder 2">
+          <p:cNvPr id="22" name="Author(s): 60pt">
+            <a:extLst>
+              <a:ext uri="{FF2B5EF4-FFF2-40B4-BE49-F238E27FC236}">
+                <a16:creationId xmlns:a16="http://schemas.microsoft.com/office/drawing/2014/main" id="{0C839D1A-8538-C2EA-DC3D-036A91A7FB2C}"/>
+              </a:ext>
+            </a:extLst>
+          </p:cNvPr>
+          <p:cNvSpPr>
+            <a:spLocks noGrp="1"/>
+          </p:cNvSpPr>
+          <p:nvPr>
+            <p:ph type="body" sz="quarter" idx="21"/>
+          </p:nvPr>
+        </p:nvSpPr>
+        <p:spPr/>
+        <p:txBody>
+          <a:bodyPr/>
+          <a:lstStyle/>
+          <a:p>
+            <a:endParaRPr lang="en-US"/>
+          </a:p>
+        </p:txBody>
+      </p:sp>
+      <p:sp>
+        <p:nvSpPr>
+          <p:cNvPr id="23" name="Affiliation(s): 48pt">
+            <a:extLst>
+              <a:ext uri="{FF2B5EF4-FFF2-40B4-BE49-F238E27FC236}">
+                <a16:creationId xmlns:a16="http://schemas.microsoft.com/office/drawing/2014/main" id="{077F9994-4E98-9699-B71E-BACC177B645A}"/>
+              </a:ext>
+            </a:extLst>
+          </p:cNvPr>
+          <p:cNvSpPr>
+            <a:spLocks noGrp="1"/>
+          </p:cNvSpPr>
+          <p:nvPr>
+            <p:ph type="body" sz="quarter" idx="45"/>
+          </p:nvPr>
+        </p:nvSpPr>
+        <p:spPr/>
+        <p:txBody>
+          <a:bodyPr/>
+          <a:lstStyle/>
+          <a:p>
+            <a:endParaRPr lang="en-US" sz="4800" dirty="0"/>
+          </a:p>
+        </p:txBody>
+      </p:sp>
+      <p:sp>
+        <p:nvSpPr>
+          <p:cNvPr id="3" name="Heading: 60pt bold">
             <a:extLst>
               <a:ext uri="{FF2B5EF4-FFF2-40B4-BE49-F238E27FC236}">
                 <a16:creationId xmlns:a16="http://schemas.microsoft.com/office/drawing/2014/main" id="{5FC702E0-567F-C45E-4A89-C1DC9BACD59A}"/>
@@ -4917,7 +5079,7 @@
       </p:sp>
       <p:sp>
         <p:nvSpPr>
-          <p:cNvPr id="4" name="Text Placeholder 3">
+          <p:cNvPr id="4" name="Insert content here: 36pt">
             <a:extLst>
               <a:ext uri="{FF2B5EF4-FFF2-40B4-BE49-F238E27FC236}">
                 <a16:creationId xmlns:a16="http://schemas.microsoft.com/office/drawing/2014/main" id="{FAF9C035-7761-A5C3-3C75-97BB93D04AA6}"/>
@@ -4942,7 +5104,7 @@
       </p:sp>
       <p:sp>
         <p:nvSpPr>
-          <p:cNvPr id="5" name="Content Placeholder 4">
+          <p:cNvPr id="5" name="Heading: 60pt bold">
             <a:extLst>
               <a:ext uri="{FF2B5EF4-FFF2-40B4-BE49-F238E27FC236}">
                 <a16:creationId xmlns:a16="http://schemas.microsoft.com/office/drawing/2014/main" id="{0B36919A-B83B-3386-9D6B-3D10544B11C3}"/>
@@ -4967,7 +5129,7 @@
       </p:sp>
       <p:sp>
         <p:nvSpPr>
-          <p:cNvPr id="6" name="Text Placeholder 5">
+          <p:cNvPr id="6" name="Insert content here: 36pt">
             <a:extLst>
               <a:ext uri="{FF2B5EF4-FFF2-40B4-BE49-F238E27FC236}">
                 <a16:creationId xmlns:a16="http://schemas.microsoft.com/office/drawing/2014/main" id="{8AD5C1E8-A83A-4185-CC2A-C4DBA01A0E98}"/>
@@ -4992,7 +5154,357 @@
       </p:sp>
       <p:sp>
         <p:nvSpPr>
-          <p:cNvPr id="7" name="Text Placeholder 6">
+          <p:cNvPr id="13" name="Heading: 60pt bold">
+            <a:extLst>
+              <a:ext uri="{FF2B5EF4-FFF2-40B4-BE49-F238E27FC236}">
+                <a16:creationId xmlns:a16="http://schemas.microsoft.com/office/drawing/2014/main" id="{C72E8474-4808-FB0E-1D8A-92F96A3CA6EA}"/>
+              </a:ext>
+            </a:extLst>
+          </p:cNvPr>
+          <p:cNvSpPr>
+            <a:spLocks noGrp="1"/>
+          </p:cNvSpPr>
+          <p:nvPr>
+            <p:ph idx="32"/>
+          </p:nvPr>
+        </p:nvSpPr>
+        <p:spPr/>
+        <p:txBody>
+          <a:bodyPr/>
+          <a:lstStyle/>
+          <a:p>
+            <a:endParaRPr lang="en-US"/>
+          </a:p>
+        </p:txBody>
+      </p:sp>
+      <p:sp>
+        <p:nvSpPr>
+          <p:cNvPr id="11" name="Insert content here: 36pt">
+            <a:extLst>
+              <a:ext uri="{FF2B5EF4-FFF2-40B4-BE49-F238E27FC236}">
+                <a16:creationId xmlns:a16="http://schemas.microsoft.com/office/drawing/2014/main" id="{6255E11D-3765-1677-3988-67FAADF81C23}"/>
+              </a:ext>
+            </a:extLst>
+          </p:cNvPr>
+          <p:cNvSpPr>
+            <a:spLocks noGrp="1"/>
+          </p:cNvSpPr>
+          <p:nvPr>
+            <p:ph type="body" sz="quarter" idx="26"/>
+          </p:nvPr>
+        </p:nvSpPr>
+        <p:spPr/>
+        <p:txBody>
+          <a:bodyPr/>
+          <a:lstStyle/>
+          <a:p>
+            <a:endParaRPr lang="en-US"/>
+          </a:p>
+        </p:txBody>
+      </p:sp>
+      <p:sp>
+        <p:nvSpPr>
+          <p:cNvPr id="12" name="Click to add figure caption">
+            <a:extLst>
+              <a:ext uri="{FF2B5EF4-FFF2-40B4-BE49-F238E27FC236}">
+                <a16:creationId xmlns:a16="http://schemas.microsoft.com/office/drawing/2014/main" id="{2DCEC0DA-02D8-E191-0FC0-44317061F3E5}"/>
+              </a:ext>
+            </a:extLst>
+          </p:cNvPr>
+          <p:cNvSpPr>
+            <a:spLocks noGrp="1"/>
+          </p:cNvSpPr>
+          <p:nvPr>
+            <p:ph type="chart" sz="quarter" idx="15"/>
+          </p:nvPr>
+        </p:nvSpPr>
+        <p:spPr/>
+        <p:txBody>
+          <a:bodyPr/>
+          <a:lstStyle/>
+          <a:p>
+            <a:endParaRPr lang="en-US"/>
+          </a:p>
+        </p:txBody>
+      </p:sp>
+      <p:sp>
+        <p:nvSpPr>
+          <p:cNvPr id="14" name="Heading: 60pt bold">
+            <a:extLst>
+              <a:ext uri="{FF2B5EF4-FFF2-40B4-BE49-F238E27FC236}">
+                <a16:creationId xmlns:a16="http://schemas.microsoft.com/office/drawing/2014/main" id="{0200F9BE-2C4D-6565-7EAD-10DF3ACC8FBD}"/>
+              </a:ext>
+            </a:extLst>
+          </p:cNvPr>
+          <p:cNvSpPr>
+            <a:spLocks noGrp="1"/>
+          </p:cNvSpPr>
+          <p:nvPr>
+            <p:ph idx="33"/>
+          </p:nvPr>
+        </p:nvSpPr>
+        <p:spPr/>
+        <p:txBody>
+          <a:bodyPr/>
+          <a:lstStyle/>
+          <a:p>
+            <a:endParaRPr lang="en-US"/>
+          </a:p>
+        </p:txBody>
+      </p:sp>
+      <p:sp>
+        <p:nvSpPr>
+          <p:cNvPr id="10" name="Insert content here: 36pt">
+            <a:extLst>
+              <a:ext uri="{FF2B5EF4-FFF2-40B4-BE49-F238E27FC236}">
+                <a16:creationId xmlns:a16="http://schemas.microsoft.com/office/drawing/2014/main" id="{90D23A77-A8E9-90BD-83FB-76E578596940}"/>
+              </a:ext>
+            </a:extLst>
+          </p:cNvPr>
+          <p:cNvSpPr>
+            <a:spLocks noGrp="1"/>
+          </p:cNvSpPr>
+          <p:nvPr>
+            <p:ph type="body" sz="quarter" idx="27"/>
+          </p:nvPr>
+        </p:nvSpPr>
+        <p:spPr/>
+        <p:txBody>
+          <a:bodyPr/>
+          <a:lstStyle/>
+          <a:p>
+            <a:endParaRPr lang="en-US"/>
+          </a:p>
+        </p:txBody>
+      </p:sp>
+      <p:sp>
+        <p:nvSpPr>
+          <p:cNvPr id="18" name="Picture Placeholder 17">
+            <a:extLst>
+              <a:ext uri="{FF2B5EF4-FFF2-40B4-BE49-F238E27FC236}">
+                <a16:creationId xmlns:a16="http://schemas.microsoft.com/office/drawing/2014/main" id="{04E03BD3-0C6D-3FC8-C8E4-61A62573194B}"/>
+              </a:ext>
+            </a:extLst>
+          </p:cNvPr>
+          <p:cNvSpPr>
+            <a:spLocks noGrp="1"/>
+          </p:cNvSpPr>
+          <p:nvPr>
+            <p:ph type="pic" sz="quarter" idx="38"/>
+          </p:nvPr>
+        </p:nvSpPr>
+        <p:spPr/>
+        <p:txBody>
+          <a:bodyPr/>
+          <a:lstStyle/>
+          <a:p>
+            <a:endParaRPr lang="en-US"/>
+          </a:p>
+        </p:txBody>
+      </p:sp>
+      <p:sp>
+        <p:nvSpPr>
+          <p:cNvPr id="20" name="Picture Placeholder 19">
+            <a:extLst>
+              <a:ext uri="{FF2B5EF4-FFF2-40B4-BE49-F238E27FC236}">
+                <a16:creationId xmlns:a16="http://schemas.microsoft.com/office/drawing/2014/main" id="{11C2FD6A-CDAF-D40E-0F93-EFDAB2E0A52D}"/>
+              </a:ext>
+            </a:extLst>
+          </p:cNvPr>
+          <p:cNvSpPr>
+            <a:spLocks noGrp="1"/>
+          </p:cNvSpPr>
+          <p:nvPr>
+            <p:ph type="pic" sz="quarter" idx="40"/>
+          </p:nvPr>
+        </p:nvSpPr>
+        <p:spPr/>
+        <p:txBody>
+          <a:bodyPr/>
+          <a:lstStyle/>
+          <a:p>
+            <a:endParaRPr lang="en-US"/>
+          </a:p>
+        </p:txBody>
+      </p:sp>
+      <p:sp>
+        <p:nvSpPr>
+          <p:cNvPr id="17" name="Click to add figure caption">
+            <a:extLst>
+              <a:ext uri="{FF2B5EF4-FFF2-40B4-BE49-F238E27FC236}">
+                <a16:creationId xmlns:a16="http://schemas.microsoft.com/office/drawing/2014/main" id="{327802C8-8B6D-1D8B-B5C4-C8B61ADD70F9}"/>
+              </a:ext>
+            </a:extLst>
+          </p:cNvPr>
+          <p:cNvSpPr>
+            <a:spLocks noGrp="1"/>
+          </p:cNvSpPr>
+          <p:nvPr>
+            <p:ph type="chart" sz="quarter" idx="37"/>
+          </p:nvPr>
+        </p:nvSpPr>
+        <p:spPr/>
+        <p:txBody>
+          <a:bodyPr/>
+          <a:lstStyle/>
+          <a:p>
+            <a:endParaRPr lang="en-US"/>
+          </a:p>
+        </p:txBody>
+      </p:sp>
+      <p:sp>
+        <p:nvSpPr>
+          <p:cNvPr id="19" name="Picture Placeholder 18">
+            <a:extLst>
+              <a:ext uri="{FF2B5EF4-FFF2-40B4-BE49-F238E27FC236}">
+                <a16:creationId xmlns:a16="http://schemas.microsoft.com/office/drawing/2014/main" id="{3BD395F9-383D-CD0C-277E-3B0753FA4FE9}"/>
+              </a:ext>
+            </a:extLst>
+          </p:cNvPr>
+          <p:cNvSpPr>
+            <a:spLocks noGrp="1"/>
+          </p:cNvSpPr>
+          <p:nvPr>
+            <p:ph type="pic" sz="quarter" idx="39"/>
+          </p:nvPr>
+        </p:nvSpPr>
+        <p:spPr/>
+        <p:txBody>
+          <a:bodyPr/>
+          <a:lstStyle/>
+          <a:p>
+            <a:endParaRPr lang="en-US"/>
+          </a:p>
+        </p:txBody>
+      </p:sp>
+      <p:sp>
+        <p:nvSpPr>
+          <p:cNvPr id="21" name="Picture Placeholder 20">
+            <a:extLst>
+              <a:ext uri="{FF2B5EF4-FFF2-40B4-BE49-F238E27FC236}">
+                <a16:creationId xmlns:a16="http://schemas.microsoft.com/office/drawing/2014/main" id="{40D43A77-C724-D282-BA9A-16025F57BA5A}"/>
+              </a:ext>
+            </a:extLst>
+          </p:cNvPr>
+          <p:cNvSpPr>
+            <a:spLocks noGrp="1"/>
+          </p:cNvSpPr>
+          <p:nvPr>
+            <p:ph type="pic" sz="quarter" idx="41"/>
+          </p:nvPr>
+        </p:nvSpPr>
+        <p:spPr/>
+        <p:txBody>
+          <a:bodyPr/>
+          <a:lstStyle/>
+          <a:p>
+            <a:endParaRPr lang="en-US"/>
+          </a:p>
+        </p:txBody>
+      </p:sp>
+      <p:sp>
+        <p:nvSpPr>
+          <p:cNvPr id="16" name="Heading: 60pt bold">
+            <a:extLst>
+              <a:ext uri="{FF2B5EF4-FFF2-40B4-BE49-F238E27FC236}">
+                <a16:creationId xmlns:a16="http://schemas.microsoft.com/office/drawing/2014/main" id="{165869E8-7DFA-9C14-325A-C137067D82CF}"/>
+              </a:ext>
+            </a:extLst>
+          </p:cNvPr>
+          <p:cNvSpPr>
+            <a:spLocks noGrp="1"/>
+          </p:cNvSpPr>
+          <p:nvPr>
+            <p:ph idx="36"/>
+          </p:nvPr>
+        </p:nvSpPr>
+        <p:spPr/>
+        <p:txBody>
+          <a:bodyPr/>
+          <a:lstStyle/>
+          <a:p>
+            <a:endParaRPr lang="en-US"/>
+          </a:p>
+        </p:txBody>
+      </p:sp>
+      <p:sp>
+        <p:nvSpPr>
+          <p:cNvPr id="9" name="Insert content here: 36pt">
+            <a:extLst>
+              <a:ext uri="{FF2B5EF4-FFF2-40B4-BE49-F238E27FC236}">
+                <a16:creationId xmlns:a16="http://schemas.microsoft.com/office/drawing/2014/main" id="{0D13E9F4-F366-2CAB-CDAD-827C061C3AAF}"/>
+              </a:ext>
+            </a:extLst>
+          </p:cNvPr>
+          <p:cNvSpPr>
+            <a:spLocks noGrp="1"/>
+          </p:cNvSpPr>
+          <p:nvPr>
+            <p:ph type="body" sz="quarter" idx="28"/>
+          </p:nvPr>
+        </p:nvSpPr>
+        <p:spPr/>
+        <p:txBody>
+          <a:bodyPr/>
+          <a:lstStyle/>
+          <a:p>
+            <a:endParaRPr lang="en-US"/>
+          </a:p>
+        </p:txBody>
+      </p:sp>
+      <p:sp>
+        <p:nvSpPr>
+          <p:cNvPr id="15" name="Heading: 60pt bold">
+            <a:extLst>
+              <a:ext uri="{FF2B5EF4-FFF2-40B4-BE49-F238E27FC236}">
+                <a16:creationId xmlns:a16="http://schemas.microsoft.com/office/drawing/2014/main" id="{44E5C3DB-6B4A-A5CB-688E-82C3AF893DB6}"/>
+              </a:ext>
+            </a:extLst>
+          </p:cNvPr>
+          <p:cNvSpPr>
+            <a:spLocks noGrp="1"/>
+          </p:cNvSpPr>
+          <p:nvPr>
+            <p:ph idx="35"/>
+          </p:nvPr>
+        </p:nvSpPr>
+        <p:spPr/>
+        <p:txBody>
+          <a:bodyPr/>
+          <a:lstStyle/>
+          <a:p>
+            <a:endParaRPr lang="en-US"/>
+          </a:p>
+        </p:txBody>
+      </p:sp>
+      <p:sp>
+        <p:nvSpPr>
+          <p:cNvPr id="8" name="Insert content here: 36pt">
+            <a:extLst>
+              <a:ext uri="{FF2B5EF4-FFF2-40B4-BE49-F238E27FC236}">
+                <a16:creationId xmlns:a16="http://schemas.microsoft.com/office/drawing/2014/main" id="{5BE4AC9D-E547-BA85-AB05-0F123CD34EB4}"/>
+              </a:ext>
+            </a:extLst>
+          </p:cNvPr>
+          <p:cNvSpPr>
+            <a:spLocks noGrp="1"/>
+          </p:cNvSpPr>
+          <p:nvPr>
+            <p:ph type="body" sz="quarter" idx="30"/>
+          </p:nvPr>
+        </p:nvSpPr>
+        <p:spPr/>
+        <p:txBody>
+          <a:bodyPr/>
+          <a:lstStyle/>
+          <a:p>
+            <a:endParaRPr lang="en-US"/>
+          </a:p>
+        </p:txBody>
+      </p:sp>
+      <p:sp>
+        <p:nvSpPr>
+          <p:cNvPr id="7" name="Insert references here: 36pt">
             <a:extLst>
               <a:ext uri="{FF2B5EF4-FFF2-40B4-BE49-F238E27FC236}">
                 <a16:creationId xmlns:a16="http://schemas.microsoft.com/office/drawing/2014/main" id="{EEE33B99-1080-36B5-FA54-371DFF448929}"/>
@@ -5004,431 +5516,6 @@
           </p:cNvSpPr>
           <p:nvPr>
             <p:ph type="body" sz="quarter" idx="31"/>
-          </p:nvPr>
-        </p:nvSpPr>
-        <p:spPr/>
-        <p:txBody>
-          <a:bodyPr/>
-          <a:lstStyle/>
-          <a:p>
-            <a:endParaRPr lang="en-US"/>
-          </a:p>
-        </p:txBody>
-      </p:sp>
-      <p:sp>
-        <p:nvSpPr>
-          <p:cNvPr id="8" name="Text Placeholder 7">
-            <a:extLst>
-              <a:ext uri="{FF2B5EF4-FFF2-40B4-BE49-F238E27FC236}">
-                <a16:creationId xmlns:a16="http://schemas.microsoft.com/office/drawing/2014/main" id="{5BE4AC9D-E547-BA85-AB05-0F123CD34EB4}"/>
-              </a:ext>
-            </a:extLst>
-          </p:cNvPr>
-          <p:cNvSpPr>
-            <a:spLocks noGrp="1"/>
-          </p:cNvSpPr>
-          <p:nvPr>
-            <p:ph type="body" sz="quarter" idx="30"/>
-          </p:nvPr>
-        </p:nvSpPr>
-        <p:spPr/>
-        <p:txBody>
-          <a:bodyPr/>
-          <a:lstStyle/>
-          <a:p>
-            <a:endParaRPr lang="en-US"/>
-          </a:p>
-        </p:txBody>
-      </p:sp>
-      <p:sp>
-        <p:nvSpPr>
-          <p:cNvPr id="9" name="Text Placeholder 8">
-            <a:extLst>
-              <a:ext uri="{FF2B5EF4-FFF2-40B4-BE49-F238E27FC236}">
-                <a16:creationId xmlns:a16="http://schemas.microsoft.com/office/drawing/2014/main" id="{0D13E9F4-F366-2CAB-CDAD-827C061C3AAF}"/>
-              </a:ext>
-            </a:extLst>
-          </p:cNvPr>
-          <p:cNvSpPr>
-            <a:spLocks noGrp="1"/>
-          </p:cNvSpPr>
-          <p:nvPr>
-            <p:ph type="body" sz="quarter" idx="28"/>
-          </p:nvPr>
-        </p:nvSpPr>
-        <p:spPr/>
-        <p:txBody>
-          <a:bodyPr/>
-          <a:lstStyle/>
-          <a:p>
-            <a:endParaRPr lang="en-US"/>
-          </a:p>
-        </p:txBody>
-      </p:sp>
-      <p:sp>
-        <p:nvSpPr>
-          <p:cNvPr id="10" name="Text Placeholder 9">
-            <a:extLst>
-              <a:ext uri="{FF2B5EF4-FFF2-40B4-BE49-F238E27FC236}">
-                <a16:creationId xmlns:a16="http://schemas.microsoft.com/office/drawing/2014/main" id="{90D23A77-A8E9-90BD-83FB-76E578596940}"/>
-              </a:ext>
-            </a:extLst>
-          </p:cNvPr>
-          <p:cNvSpPr>
-            <a:spLocks noGrp="1"/>
-          </p:cNvSpPr>
-          <p:nvPr>
-            <p:ph type="body" sz="quarter" idx="27"/>
-          </p:nvPr>
-        </p:nvSpPr>
-        <p:spPr/>
-        <p:txBody>
-          <a:bodyPr/>
-          <a:lstStyle/>
-          <a:p>
-            <a:endParaRPr lang="en-US"/>
-          </a:p>
-        </p:txBody>
-      </p:sp>
-      <p:sp>
-        <p:nvSpPr>
-          <p:cNvPr id="11" name="Text Placeholder 10">
-            <a:extLst>
-              <a:ext uri="{FF2B5EF4-FFF2-40B4-BE49-F238E27FC236}">
-                <a16:creationId xmlns:a16="http://schemas.microsoft.com/office/drawing/2014/main" id="{6255E11D-3765-1677-3988-67FAADF81C23}"/>
-              </a:ext>
-            </a:extLst>
-          </p:cNvPr>
-          <p:cNvSpPr>
-            <a:spLocks noGrp="1"/>
-          </p:cNvSpPr>
-          <p:nvPr>
-            <p:ph type="body" sz="quarter" idx="26"/>
-          </p:nvPr>
-        </p:nvSpPr>
-        <p:spPr/>
-        <p:txBody>
-          <a:bodyPr/>
-          <a:lstStyle/>
-          <a:p>
-            <a:endParaRPr lang="en-US"/>
-          </a:p>
-        </p:txBody>
-      </p:sp>
-      <p:sp>
-        <p:nvSpPr>
-          <p:cNvPr id="12" name="Chart Placeholder 11">
-            <a:extLst>
-              <a:ext uri="{FF2B5EF4-FFF2-40B4-BE49-F238E27FC236}">
-                <a16:creationId xmlns:a16="http://schemas.microsoft.com/office/drawing/2014/main" id="{2DCEC0DA-02D8-E191-0FC0-44317061F3E5}"/>
-              </a:ext>
-            </a:extLst>
-          </p:cNvPr>
-          <p:cNvSpPr>
-            <a:spLocks noGrp="1"/>
-          </p:cNvSpPr>
-          <p:nvPr>
-            <p:ph type="chart" sz="quarter" idx="15"/>
-          </p:nvPr>
-        </p:nvSpPr>
-        <p:spPr/>
-        <p:txBody>
-          <a:bodyPr/>
-          <a:lstStyle/>
-          <a:p>
-            <a:endParaRPr lang="en-US"/>
-          </a:p>
-        </p:txBody>
-      </p:sp>
-      <p:sp>
-        <p:nvSpPr>
-          <p:cNvPr id="13" name="Content Placeholder 12">
-            <a:extLst>
-              <a:ext uri="{FF2B5EF4-FFF2-40B4-BE49-F238E27FC236}">
-                <a16:creationId xmlns:a16="http://schemas.microsoft.com/office/drawing/2014/main" id="{C72E8474-4808-FB0E-1D8A-92F96A3CA6EA}"/>
-              </a:ext>
-            </a:extLst>
-          </p:cNvPr>
-          <p:cNvSpPr>
-            <a:spLocks noGrp="1"/>
-          </p:cNvSpPr>
-          <p:nvPr>
-            <p:ph idx="32"/>
-          </p:nvPr>
-        </p:nvSpPr>
-        <p:spPr/>
-        <p:txBody>
-          <a:bodyPr/>
-          <a:lstStyle/>
-          <a:p>
-            <a:endParaRPr lang="en-US"/>
-          </a:p>
-        </p:txBody>
-      </p:sp>
-      <p:sp>
-        <p:nvSpPr>
-          <p:cNvPr id="14" name="Content Placeholder 13">
-            <a:extLst>
-              <a:ext uri="{FF2B5EF4-FFF2-40B4-BE49-F238E27FC236}">
-                <a16:creationId xmlns:a16="http://schemas.microsoft.com/office/drawing/2014/main" id="{0200F9BE-2C4D-6565-7EAD-10DF3ACC8FBD}"/>
-              </a:ext>
-            </a:extLst>
-          </p:cNvPr>
-          <p:cNvSpPr>
-            <a:spLocks noGrp="1"/>
-          </p:cNvSpPr>
-          <p:nvPr>
-            <p:ph idx="33"/>
-          </p:nvPr>
-        </p:nvSpPr>
-        <p:spPr/>
-        <p:txBody>
-          <a:bodyPr/>
-          <a:lstStyle/>
-          <a:p>
-            <a:endParaRPr lang="en-US"/>
-          </a:p>
-        </p:txBody>
-      </p:sp>
-      <p:sp>
-        <p:nvSpPr>
-          <p:cNvPr id="15" name="Content Placeholder 14">
-            <a:extLst>
-              <a:ext uri="{FF2B5EF4-FFF2-40B4-BE49-F238E27FC236}">
-                <a16:creationId xmlns:a16="http://schemas.microsoft.com/office/drawing/2014/main" id="{44E5C3DB-6B4A-A5CB-688E-82C3AF893DB6}"/>
-              </a:ext>
-            </a:extLst>
-          </p:cNvPr>
-          <p:cNvSpPr>
-            <a:spLocks noGrp="1"/>
-          </p:cNvSpPr>
-          <p:nvPr>
-            <p:ph idx="35"/>
-          </p:nvPr>
-        </p:nvSpPr>
-        <p:spPr/>
-        <p:txBody>
-          <a:bodyPr/>
-          <a:lstStyle/>
-          <a:p>
-            <a:endParaRPr lang="en-US"/>
-          </a:p>
-        </p:txBody>
-      </p:sp>
-      <p:sp>
-        <p:nvSpPr>
-          <p:cNvPr id="16" name="Content Placeholder 15">
-            <a:extLst>
-              <a:ext uri="{FF2B5EF4-FFF2-40B4-BE49-F238E27FC236}">
-                <a16:creationId xmlns:a16="http://schemas.microsoft.com/office/drawing/2014/main" id="{165869E8-7DFA-9C14-325A-C137067D82CF}"/>
-              </a:ext>
-            </a:extLst>
-          </p:cNvPr>
-          <p:cNvSpPr>
-            <a:spLocks noGrp="1"/>
-          </p:cNvSpPr>
-          <p:nvPr>
-            <p:ph idx="36"/>
-          </p:nvPr>
-        </p:nvSpPr>
-        <p:spPr/>
-        <p:txBody>
-          <a:bodyPr/>
-          <a:lstStyle/>
-          <a:p>
-            <a:endParaRPr lang="en-US"/>
-          </a:p>
-        </p:txBody>
-      </p:sp>
-      <p:sp>
-        <p:nvSpPr>
-          <p:cNvPr id="17" name="Chart Placeholder 16">
-            <a:extLst>
-              <a:ext uri="{FF2B5EF4-FFF2-40B4-BE49-F238E27FC236}">
-                <a16:creationId xmlns:a16="http://schemas.microsoft.com/office/drawing/2014/main" id="{327802C8-8B6D-1D8B-B5C4-C8B61ADD70F9}"/>
-              </a:ext>
-            </a:extLst>
-          </p:cNvPr>
-          <p:cNvSpPr>
-            <a:spLocks noGrp="1"/>
-          </p:cNvSpPr>
-          <p:nvPr>
-            <p:ph type="chart" sz="quarter" idx="37"/>
-          </p:nvPr>
-        </p:nvSpPr>
-        <p:spPr/>
-        <p:txBody>
-          <a:bodyPr/>
-          <a:lstStyle/>
-          <a:p>
-            <a:endParaRPr lang="en-US"/>
-          </a:p>
-        </p:txBody>
-      </p:sp>
-      <p:sp>
-        <p:nvSpPr>
-          <p:cNvPr id="18" name="Picture Placeholder 17">
-            <a:extLst>
-              <a:ext uri="{FF2B5EF4-FFF2-40B4-BE49-F238E27FC236}">
-                <a16:creationId xmlns:a16="http://schemas.microsoft.com/office/drawing/2014/main" id="{04E03BD3-0C6D-3FC8-C8E4-61A62573194B}"/>
-              </a:ext>
-            </a:extLst>
-          </p:cNvPr>
-          <p:cNvSpPr>
-            <a:spLocks noGrp="1"/>
-          </p:cNvSpPr>
-          <p:nvPr>
-            <p:ph type="pic" sz="quarter" idx="38"/>
-          </p:nvPr>
-        </p:nvSpPr>
-        <p:spPr/>
-        <p:txBody>
-          <a:bodyPr/>
-          <a:lstStyle/>
-          <a:p>
-            <a:endParaRPr lang="en-US"/>
-          </a:p>
-        </p:txBody>
-      </p:sp>
-      <p:sp>
-        <p:nvSpPr>
-          <p:cNvPr id="19" name="Picture Placeholder 18">
-            <a:extLst>
-              <a:ext uri="{FF2B5EF4-FFF2-40B4-BE49-F238E27FC236}">
-                <a16:creationId xmlns:a16="http://schemas.microsoft.com/office/drawing/2014/main" id="{3BD395F9-383D-CD0C-277E-3B0753FA4FE9}"/>
-              </a:ext>
-            </a:extLst>
-          </p:cNvPr>
-          <p:cNvSpPr>
-            <a:spLocks noGrp="1"/>
-          </p:cNvSpPr>
-          <p:nvPr>
-            <p:ph type="pic" sz="quarter" idx="39"/>
-          </p:nvPr>
-        </p:nvSpPr>
-        <p:spPr/>
-        <p:txBody>
-          <a:bodyPr/>
-          <a:lstStyle/>
-          <a:p>
-            <a:endParaRPr lang="en-US"/>
-          </a:p>
-        </p:txBody>
-      </p:sp>
-      <p:sp>
-        <p:nvSpPr>
-          <p:cNvPr id="20" name="Picture Placeholder 19">
-            <a:extLst>
-              <a:ext uri="{FF2B5EF4-FFF2-40B4-BE49-F238E27FC236}">
-                <a16:creationId xmlns:a16="http://schemas.microsoft.com/office/drawing/2014/main" id="{11C2FD6A-CDAF-D40E-0F93-EFDAB2E0A52D}"/>
-              </a:ext>
-            </a:extLst>
-          </p:cNvPr>
-          <p:cNvSpPr>
-            <a:spLocks noGrp="1"/>
-          </p:cNvSpPr>
-          <p:nvPr>
-            <p:ph type="pic" sz="quarter" idx="40"/>
-          </p:nvPr>
-        </p:nvSpPr>
-        <p:spPr/>
-        <p:txBody>
-          <a:bodyPr/>
-          <a:lstStyle/>
-          <a:p>
-            <a:endParaRPr lang="en-US"/>
-          </a:p>
-        </p:txBody>
-      </p:sp>
-      <p:sp>
-        <p:nvSpPr>
-          <p:cNvPr id="21" name="Picture Placeholder 20">
-            <a:extLst>
-              <a:ext uri="{FF2B5EF4-FFF2-40B4-BE49-F238E27FC236}">
-                <a16:creationId xmlns:a16="http://schemas.microsoft.com/office/drawing/2014/main" id="{40D43A77-C724-D282-BA9A-16025F57BA5A}"/>
-              </a:ext>
-            </a:extLst>
-          </p:cNvPr>
-          <p:cNvSpPr>
-            <a:spLocks noGrp="1"/>
-          </p:cNvSpPr>
-          <p:nvPr>
-            <p:ph type="pic" sz="quarter" idx="41"/>
-          </p:nvPr>
-        </p:nvSpPr>
-        <p:spPr/>
-        <p:txBody>
-          <a:bodyPr/>
-          <a:lstStyle/>
-          <a:p>
-            <a:endParaRPr lang="en-US"/>
-          </a:p>
-        </p:txBody>
-      </p:sp>
-      <p:sp>
-        <p:nvSpPr>
-          <p:cNvPr id="22" name="Text Placeholder 21">
-            <a:extLst>
-              <a:ext uri="{FF2B5EF4-FFF2-40B4-BE49-F238E27FC236}">
-                <a16:creationId xmlns:a16="http://schemas.microsoft.com/office/drawing/2014/main" id="{0C839D1A-8538-C2EA-DC3D-036A91A7FB2C}"/>
-              </a:ext>
-            </a:extLst>
-          </p:cNvPr>
-          <p:cNvSpPr>
-            <a:spLocks noGrp="1"/>
-          </p:cNvSpPr>
-          <p:nvPr>
-            <p:ph type="body" sz="quarter" idx="21"/>
-          </p:nvPr>
-        </p:nvSpPr>
-        <p:spPr/>
-        <p:txBody>
-          <a:bodyPr/>
-          <a:lstStyle/>
-          <a:p>
-            <a:endParaRPr lang="en-US"/>
-          </a:p>
-        </p:txBody>
-      </p:sp>
-      <p:sp>
-        <p:nvSpPr>
-          <p:cNvPr id="23" name="Text Placeholder 22">
-            <a:extLst>
-              <a:ext uri="{FF2B5EF4-FFF2-40B4-BE49-F238E27FC236}">
-                <a16:creationId xmlns:a16="http://schemas.microsoft.com/office/drawing/2014/main" id="{077F9994-4E98-9699-B71E-BACC177B645A}"/>
-              </a:ext>
-            </a:extLst>
-          </p:cNvPr>
-          <p:cNvSpPr>
-            <a:spLocks noGrp="1"/>
-          </p:cNvSpPr>
-          <p:nvPr>
-            <p:ph type="body" sz="quarter" idx="45"/>
-          </p:nvPr>
-        </p:nvSpPr>
-        <p:spPr/>
-        <p:txBody>
-          <a:bodyPr/>
-          <a:lstStyle/>
-          <a:p>
-            <a:endParaRPr lang="en-US" sz="4800" dirty="0"/>
-          </a:p>
-        </p:txBody>
-      </p:sp>
-      <p:sp>
-        <p:nvSpPr>
-          <p:cNvPr id="24" name="Title 23">
-            <a:extLst>
-              <a:ext uri="{FF2B5EF4-FFF2-40B4-BE49-F238E27FC236}">
-                <a16:creationId xmlns:a16="http://schemas.microsoft.com/office/drawing/2014/main" id="{8B2ED90E-31D2-2E36-5570-A4AB2529320E}"/>
-              </a:ext>
-            </a:extLst>
-          </p:cNvPr>
-          <p:cNvSpPr>
-            <a:spLocks noGrp="1"/>
-          </p:cNvSpPr>
-          <p:nvPr>
-            <p:ph type="title"/>
           </p:nvPr>
         </p:nvSpPr>
         <p:spPr/>
@@ -5491,24 +5578,52 @@
           <a:bodyPr/>
           <a:lstStyle/>
           <a:p>
+            <a:r>
+              <a:rPr lang="en-US"/>
+              <a:t>36x48 horizontal poster template — layout 2</a:t>
+            </a:r>
+          </a:p>
+        </p:txBody>
+      </p:sp>
+      <p:sp>
+        <p:nvSpPr>
+          <p:cNvPr id="3" name="Logo or QRC">
+            <a:extLst>
+              <a:ext uri="{FF2B5EF4-FFF2-40B4-BE49-F238E27FC236}">
+                <a16:creationId xmlns:a16="http://schemas.microsoft.com/office/drawing/2014/main" id="{A43127DB-0551-B8D6-E84B-40E5BBB2B45C}"/>
+              </a:ext>
+            </a:extLst>
+          </p:cNvPr>
+          <p:cNvSpPr>
+            <a:spLocks noGrp="1"/>
+          </p:cNvSpPr>
+          <p:nvPr>
+            <p:ph type="pic" sz="quarter" idx="23"/>
+          </p:nvPr>
+        </p:nvSpPr>
+        <p:spPr/>
+        <p:txBody>
+          <a:bodyPr/>
+          <a:lstStyle/>
+          <a:p>
             <a:endParaRPr lang="en-US"/>
           </a:p>
         </p:txBody>
       </p:sp>
       <p:sp>
         <p:nvSpPr>
-          <p:cNvPr id="3" name="Picture Placeholder 2">
-            <a:extLst>
-              <a:ext uri="{FF2B5EF4-FFF2-40B4-BE49-F238E27FC236}">
-                <a16:creationId xmlns:a16="http://schemas.microsoft.com/office/drawing/2014/main" id="{A43127DB-0551-B8D6-E84B-40E5BBB2B45C}"/>
-              </a:ext>
-            </a:extLst>
-          </p:cNvPr>
-          <p:cNvSpPr>
-            <a:spLocks noGrp="1"/>
-          </p:cNvSpPr>
-          <p:nvPr>
-            <p:ph type="pic" sz="quarter" idx="23"/>
+          <p:cNvPr id="20" name="Author(s): 60pt">
+            <a:extLst>
+              <a:ext uri="{FF2B5EF4-FFF2-40B4-BE49-F238E27FC236}">
+                <a16:creationId xmlns:a16="http://schemas.microsoft.com/office/drawing/2014/main" id="{BE4A1454-8694-4609-B556-071271CED40C}"/>
+              </a:ext>
+            </a:extLst>
+          </p:cNvPr>
+          <p:cNvSpPr>
+            <a:spLocks noGrp="1"/>
+          </p:cNvSpPr>
+          <p:nvPr>
+            <p:ph type="body" sz="quarter" idx="21"/>
           </p:nvPr>
         </p:nvSpPr>
         <p:spPr/>
@@ -5516,24 +5631,74 @@
           <a:bodyPr/>
           <a:lstStyle/>
           <a:p>
+            <a:endParaRPr lang="en-US" dirty="0"/>
+          </a:p>
+        </p:txBody>
+      </p:sp>
+      <p:sp>
+        <p:nvSpPr>
+          <p:cNvPr id="21" name="Affiliation(s): 48pt">
+            <a:extLst>
+              <a:ext uri="{FF2B5EF4-FFF2-40B4-BE49-F238E27FC236}">
+                <a16:creationId xmlns:a16="http://schemas.microsoft.com/office/drawing/2014/main" id="{27DCE3FC-3CE1-0479-8C72-AE3972D09B3F}"/>
+              </a:ext>
+            </a:extLst>
+          </p:cNvPr>
+          <p:cNvSpPr>
+            <a:spLocks noGrp="1"/>
+          </p:cNvSpPr>
+          <p:nvPr>
+            <p:ph type="body" sz="quarter" idx="45"/>
+          </p:nvPr>
+        </p:nvSpPr>
+        <p:spPr/>
+        <p:txBody>
+          <a:bodyPr/>
+          <a:lstStyle/>
+          <a:p>
+            <a:endParaRPr lang="en-US" sz="4800" dirty="0"/>
+          </a:p>
+        </p:txBody>
+      </p:sp>
+      <p:sp>
+        <p:nvSpPr>
+          <p:cNvPr id="4" name="Heading: 60pt bold">
+            <a:extLst>
+              <a:ext uri="{FF2B5EF4-FFF2-40B4-BE49-F238E27FC236}">
+                <a16:creationId xmlns:a16="http://schemas.microsoft.com/office/drawing/2014/main" id="{4EC0B73A-FDB8-6A11-F000-ED66BD64D7E7}"/>
+              </a:ext>
+            </a:extLst>
+          </p:cNvPr>
+          <p:cNvSpPr>
+            <a:spLocks noGrp="1"/>
+          </p:cNvSpPr>
+          <p:nvPr>
+            <p:ph idx="1"/>
+          </p:nvPr>
+        </p:nvSpPr>
+        <p:spPr/>
+        <p:txBody>
+          <a:bodyPr/>
+          <a:lstStyle/>
+          <a:p>
             <a:endParaRPr lang="en-US"/>
           </a:p>
         </p:txBody>
       </p:sp>
       <p:sp>
         <p:nvSpPr>
-          <p:cNvPr id="4" name="Content Placeholder 3">
-            <a:extLst>
-              <a:ext uri="{FF2B5EF4-FFF2-40B4-BE49-F238E27FC236}">
-                <a16:creationId xmlns:a16="http://schemas.microsoft.com/office/drawing/2014/main" id="{4EC0B73A-FDB8-6A11-F000-ED66BD64D7E7}"/>
-              </a:ext>
-            </a:extLst>
-          </p:cNvPr>
-          <p:cNvSpPr>
-            <a:spLocks noGrp="1"/>
-          </p:cNvSpPr>
-          <p:nvPr>
-            <p:ph idx="1"/>
+          <p:cNvPr id="5" name="Insert content here: 36pt">
+            <a:extLst>
+              <a:ext uri="{FF2B5EF4-FFF2-40B4-BE49-F238E27FC236}">
+                <a16:creationId xmlns:a16="http://schemas.microsoft.com/office/drawing/2014/main" id="{62E22B8F-29CC-912D-AD4D-7CADC2EDA267}"/>
+              </a:ext>
+            </a:extLst>
+          </p:cNvPr>
+          <p:cNvSpPr>
+            <a:spLocks noGrp="1"/>
+          </p:cNvSpPr>
+          <p:nvPr>
+            <p:ph type="body" sz="quarter" idx="22"/>
           </p:nvPr>
         </p:nvSpPr>
         <p:spPr/>
@@ -5547,18 +5712,18 @@
       </p:sp>
       <p:sp>
         <p:nvSpPr>
-          <p:cNvPr id="5" name="Text Placeholder 4">
-            <a:extLst>
-              <a:ext uri="{FF2B5EF4-FFF2-40B4-BE49-F238E27FC236}">
-                <a16:creationId xmlns:a16="http://schemas.microsoft.com/office/drawing/2014/main" id="{62E22B8F-29CC-912D-AD4D-7CADC2EDA267}"/>
-              </a:ext>
-            </a:extLst>
-          </p:cNvPr>
-          <p:cNvSpPr>
-            <a:spLocks noGrp="1"/>
-          </p:cNvSpPr>
-          <p:nvPr>
-            <p:ph type="body" sz="quarter" idx="22"/>
+          <p:cNvPr id="6" name="Heading: 60pt bold">
+            <a:extLst>
+              <a:ext uri="{FF2B5EF4-FFF2-40B4-BE49-F238E27FC236}">
+                <a16:creationId xmlns:a16="http://schemas.microsoft.com/office/drawing/2014/main" id="{DD0550F8-D745-32B7-5607-E2B61FE96ED3}"/>
+              </a:ext>
+            </a:extLst>
+          </p:cNvPr>
+          <p:cNvSpPr>
+            <a:spLocks noGrp="1"/>
+          </p:cNvSpPr>
+          <p:nvPr>
+            <p:ph idx="19"/>
           </p:nvPr>
         </p:nvSpPr>
         <p:spPr/>
@@ -5572,18 +5737,18 @@
       </p:sp>
       <p:sp>
         <p:nvSpPr>
-          <p:cNvPr id="6" name="Content Placeholder 5">
-            <a:extLst>
-              <a:ext uri="{FF2B5EF4-FFF2-40B4-BE49-F238E27FC236}">
-                <a16:creationId xmlns:a16="http://schemas.microsoft.com/office/drawing/2014/main" id="{DD0550F8-D745-32B7-5607-E2B61FE96ED3}"/>
-              </a:ext>
-            </a:extLst>
-          </p:cNvPr>
-          <p:cNvSpPr>
-            <a:spLocks noGrp="1"/>
-          </p:cNvSpPr>
-          <p:nvPr>
-            <p:ph idx="19"/>
+          <p:cNvPr id="7" name="Insert content here: 36pt">
+            <a:extLst>
+              <a:ext uri="{FF2B5EF4-FFF2-40B4-BE49-F238E27FC236}">
+                <a16:creationId xmlns:a16="http://schemas.microsoft.com/office/drawing/2014/main" id="{FC77A75A-D8E0-9875-A60A-4369BC83EFC8}"/>
+              </a:ext>
+            </a:extLst>
+          </p:cNvPr>
+          <p:cNvSpPr>
+            <a:spLocks noGrp="1"/>
+          </p:cNvSpPr>
+          <p:nvPr>
+            <p:ph type="body" sz="quarter" idx="25"/>
           </p:nvPr>
         </p:nvSpPr>
         <p:spPr/>
@@ -5597,18 +5762,18 @@
       </p:sp>
       <p:sp>
         <p:nvSpPr>
-          <p:cNvPr id="7" name="Text Placeholder 6">
-            <a:extLst>
-              <a:ext uri="{FF2B5EF4-FFF2-40B4-BE49-F238E27FC236}">
-                <a16:creationId xmlns:a16="http://schemas.microsoft.com/office/drawing/2014/main" id="{FC77A75A-D8E0-9875-A60A-4369BC83EFC8}"/>
-              </a:ext>
-            </a:extLst>
-          </p:cNvPr>
-          <p:cNvSpPr>
-            <a:spLocks noGrp="1"/>
-          </p:cNvSpPr>
-          <p:nvPr>
-            <p:ph type="body" sz="quarter" idx="25"/>
+          <p:cNvPr id="14" name="Heading: 60pt bold">
+            <a:extLst>
+              <a:ext uri="{FF2B5EF4-FFF2-40B4-BE49-F238E27FC236}">
+                <a16:creationId xmlns:a16="http://schemas.microsoft.com/office/drawing/2014/main" id="{0A185938-12B6-39E4-7D53-028E9CC15620}"/>
+              </a:ext>
+            </a:extLst>
+          </p:cNvPr>
+          <p:cNvSpPr>
+            <a:spLocks noGrp="1"/>
+          </p:cNvSpPr>
+          <p:nvPr>
+            <p:ph idx="32"/>
           </p:nvPr>
         </p:nvSpPr>
         <p:spPr/>
@@ -5622,7 +5787,257 @@
       </p:sp>
       <p:sp>
         <p:nvSpPr>
-          <p:cNvPr id="8" name="Text Placeholder 7">
+          <p:cNvPr id="13" name="Insert content here: 36pt">
+            <a:extLst>
+              <a:ext uri="{FF2B5EF4-FFF2-40B4-BE49-F238E27FC236}">
+                <a16:creationId xmlns:a16="http://schemas.microsoft.com/office/drawing/2014/main" id="{F44CC01E-5E7E-D0E7-9EAF-D6128A97ADE2}"/>
+              </a:ext>
+            </a:extLst>
+          </p:cNvPr>
+          <p:cNvSpPr>
+            <a:spLocks noGrp="1"/>
+          </p:cNvSpPr>
+          <p:nvPr>
+            <p:ph type="body" sz="quarter" idx="26"/>
+          </p:nvPr>
+        </p:nvSpPr>
+        <p:spPr/>
+        <p:txBody>
+          <a:bodyPr/>
+          <a:lstStyle/>
+          <a:p>
+            <a:endParaRPr lang="en-US"/>
+          </a:p>
+        </p:txBody>
+      </p:sp>
+      <p:sp>
+        <p:nvSpPr>
+          <p:cNvPr id="19" name="Picture Placeholder 18">
+            <a:extLst>
+              <a:ext uri="{FF2B5EF4-FFF2-40B4-BE49-F238E27FC236}">
+                <a16:creationId xmlns:a16="http://schemas.microsoft.com/office/drawing/2014/main" id="{A5791061-AC7C-AFFB-AEE6-03847156425C}"/>
+              </a:ext>
+            </a:extLst>
+          </p:cNvPr>
+          <p:cNvSpPr>
+            <a:spLocks noGrp="1"/>
+          </p:cNvSpPr>
+          <p:nvPr>
+            <p:ph type="pic" sz="quarter" idx="44"/>
+          </p:nvPr>
+        </p:nvSpPr>
+        <p:spPr/>
+        <p:txBody>
+          <a:bodyPr/>
+          <a:lstStyle/>
+          <a:p>
+            <a:endParaRPr lang="en-US"/>
+          </a:p>
+        </p:txBody>
+      </p:sp>
+      <p:sp>
+        <p:nvSpPr>
+          <p:cNvPr id="18" name="Picture Placeholder 17">
+            <a:extLst>
+              <a:ext uri="{FF2B5EF4-FFF2-40B4-BE49-F238E27FC236}">
+                <a16:creationId xmlns:a16="http://schemas.microsoft.com/office/drawing/2014/main" id="{BA16EECE-E2B2-2364-B41A-12316D3DDC0B}"/>
+              </a:ext>
+            </a:extLst>
+          </p:cNvPr>
+          <p:cNvSpPr>
+            <a:spLocks noGrp="1"/>
+          </p:cNvSpPr>
+          <p:nvPr>
+            <p:ph type="pic" sz="quarter" idx="43"/>
+          </p:nvPr>
+        </p:nvSpPr>
+        <p:spPr/>
+        <p:txBody>
+          <a:bodyPr/>
+          <a:lstStyle/>
+          <a:p>
+            <a:endParaRPr lang="en-US"/>
+          </a:p>
+        </p:txBody>
+      </p:sp>
+      <p:sp>
+        <p:nvSpPr>
+          <p:cNvPr id="15" name="Click to add figure caption">
+            <a:extLst>
+              <a:ext uri="{FF2B5EF4-FFF2-40B4-BE49-F238E27FC236}">
+                <a16:creationId xmlns:a16="http://schemas.microsoft.com/office/drawing/2014/main" id="{E643DCD1-45AD-801B-083B-8ABE0618842A}"/>
+              </a:ext>
+            </a:extLst>
+          </p:cNvPr>
+          <p:cNvSpPr>
+            <a:spLocks noGrp="1"/>
+          </p:cNvSpPr>
+          <p:nvPr>
+            <p:ph type="chart" sz="quarter" idx="37"/>
+          </p:nvPr>
+        </p:nvSpPr>
+        <p:spPr/>
+        <p:txBody>
+          <a:bodyPr/>
+          <a:lstStyle/>
+          <a:p>
+            <a:endParaRPr lang="en-US"/>
+          </a:p>
+        </p:txBody>
+      </p:sp>
+      <p:sp>
+        <p:nvSpPr>
+          <p:cNvPr id="17" name="Picture Placeholder 16">
+            <a:extLst>
+              <a:ext uri="{FF2B5EF4-FFF2-40B4-BE49-F238E27FC236}">
+                <a16:creationId xmlns:a16="http://schemas.microsoft.com/office/drawing/2014/main" id="{446516F8-42F9-879F-68CE-372D67F1770E}"/>
+              </a:ext>
+            </a:extLst>
+          </p:cNvPr>
+          <p:cNvSpPr>
+            <a:spLocks noGrp="1"/>
+          </p:cNvSpPr>
+          <p:nvPr>
+            <p:ph type="pic" sz="quarter" idx="42"/>
+          </p:nvPr>
+        </p:nvSpPr>
+        <p:spPr/>
+        <p:txBody>
+          <a:bodyPr/>
+          <a:lstStyle/>
+          <a:p>
+            <a:endParaRPr lang="en-US"/>
+          </a:p>
+        </p:txBody>
+      </p:sp>
+      <p:sp>
+        <p:nvSpPr>
+          <p:cNvPr id="16" name="Picture Placeholder 15">
+            <a:extLst>
+              <a:ext uri="{FF2B5EF4-FFF2-40B4-BE49-F238E27FC236}">
+                <a16:creationId xmlns:a16="http://schemas.microsoft.com/office/drawing/2014/main" id="{E3149202-894E-4D86-504B-813C3BF693A4}"/>
+              </a:ext>
+            </a:extLst>
+          </p:cNvPr>
+          <p:cNvSpPr>
+            <a:spLocks noGrp="1"/>
+          </p:cNvSpPr>
+          <p:nvPr>
+            <p:ph type="pic" sz="quarter" idx="41"/>
+          </p:nvPr>
+        </p:nvSpPr>
+        <p:spPr/>
+        <p:txBody>
+          <a:bodyPr/>
+          <a:lstStyle/>
+          <a:p>
+            <a:endParaRPr lang="en-US"/>
+          </a:p>
+        </p:txBody>
+      </p:sp>
+      <p:sp>
+        <p:nvSpPr>
+          <p:cNvPr id="12" name="Heading: 60pt bold">
+            <a:extLst>
+              <a:ext uri="{FF2B5EF4-FFF2-40B4-BE49-F238E27FC236}">
+                <a16:creationId xmlns:a16="http://schemas.microsoft.com/office/drawing/2014/main" id="{8C178A25-7173-D44C-2888-E5AC8D71AF87}"/>
+              </a:ext>
+            </a:extLst>
+          </p:cNvPr>
+          <p:cNvSpPr>
+            <a:spLocks noGrp="1"/>
+          </p:cNvSpPr>
+          <p:nvPr>
+            <p:ph idx="36"/>
+          </p:nvPr>
+        </p:nvSpPr>
+        <p:spPr/>
+        <p:txBody>
+          <a:bodyPr/>
+          <a:lstStyle/>
+          <a:p>
+            <a:endParaRPr lang="en-US"/>
+          </a:p>
+        </p:txBody>
+      </p:sp>
+      <p:sp>
+        <p:nvSpPr>
+          <p:cNvPr id="10" name="Insert content here: 36pt">
+            <a:extLst>
+              <a:ext uri="{FF2B5EF4-FFF2-40B4-BE49-F238E27FC236}">
+                <a16:creationId xmlns:a16="http://schemas.microsoft.com/office/drawing/2014/main" id="{197A0495-29FA-D827-C5DE-86533BAF5323}"/>
+              </a:ext>
+            </a:extLst>
+          </p:cNvPr>
+          <p:cNvSpPr>
+            <a:spLocks noGrp="1"/>
+          </p:cNvSpPr>
+          <p:nvPr>
+            <p:ph type="body" sz="quarter" idx="28"/>
+          </p:nvPr>
+        </p:nvSpPr>
+        <p:spPr/>
+        <p:txBody>
+          <a:bodyPr/>
+          <a:lstStyle/>
+          <a:p>
+            <a:endParaRPr lang="en-US"/>
+          </a:p>
+        </p:txBody>
+      </p:sp>
+      <p:sp>
+        <p:nvSpPr>
+          <p:cNvPr id="11" name="Heading: 60pt bold">
+            <a:extLst>
+              <a:ext uri="{FF2B5EF4-FFF2-40B4-BE49-F238E27FC236}">
+                <a16:creationId xmlns:a16="http://schemas.microsoft.com/office/drawing/2014/main" id="{890B212D-404A-2DB0-E530-162FE0512E51}"/>
+              </a:ext>
+            </a:extLst>
+          </p:cNvPr>
+          <p:cNvSpPr>
+            <a:spLocks noGrp="1"/>
+          </p:cNvSpPr>
+          <p:nvPr>
+            <p:ph idx="35"/>
+          </p:nvPr>
+        </p:nvSpPr>
+        <p:spPr/>
+        <p:txBody>
+          <a:bodyPr/>
+          <a:lstStyle/>
+          <a:p>
+            <a:endParaRPr lang="en-US"/>
+          </a:p>
+        </p:txBody>
+      </p:sp>
+      <p:sp>
+        <p:nvSpPr>
+          <p:cNvPr id="9" name="Insert content here: 36pt">
+            <a:extLst>
+              <a:ext uri="{FF2B5EF4-FFF2-40B4-BE49-F238E27FC236}">
+                <a16:creationId xmlns:a16="http://schemas.microsoft.com/office/drawing/2014/main" id="{949E339F-0F35-1603-B65D-76003688E3A5}"/>
+              </a:ext>
+            </a:extLst>
+          </p:cNvPr>
+          <p:cNvSpPr>
+            <a:spLocks noGrp="1"/>
+          </p:cNvSpPr>
+          <p:nvPr>
+            <p:ph type="body" sz="quarter" idx="30"/>
+          </p:nvPr>
+        </p:nvSpPr>
+        <p:spPr/>
+        <p:txBody>
+          <a:bodyPr/>
+          <a:lstStyle/>
+          <a:p>
+            <a:endParaRPr lang="en-US"/>
+          </a:p>
+        </p:txBody>
+      </p:sp>
+      <p:sp>
+        <p:nvSpPr>
+          <p:cNvPr id="8" name="Insert references here: 36pt">
             <a:extLst>
               <a:ext uri="{FF2B5EF4-FFF2-40B4-BE49-F238E27FC236}">
                 <a16:creationId xmlns:a16="http://schemas.microsoft.com/office/drawing/2014/main" id="{9B2167D7-8D2C-9D33-042A-6E9588DD7D95}"/>
@@ -5642,331 +6057,6 @@
           <a:lstStyle/>
           <a:p>
             <a:endParaRPr lang="en-US"/>
-          </a:p>
-        </p:txBody>
-      </p:sp>
-      <p:sp>
-        <p:nvSpPr>
-          <p:cNvPr id="9" name="Text Placeholder 8">
-            <a:extLst>
-              <a:ext uri="{FF2B5EF4-FFF2-40B4-BE49-F238E27FC236}">
-                <a16:creationId xmlns:a16="http://schemas.microsoft.com/office/drawing/2014/main" id="{949E339F-0F35-1603-B65D-76003688E3A5}"/>
-              </a:ext>
-            </a:extLst>
-          </p:cNvPr>
-          <p:cNvSpPr>
-            <a:spLocks noGrp="1"/>
-          </p:cNvSpPr>
-          <p:nvPr>
-            <p:ph type="body" sz="quarter" idx="30"/>
-          </p:nvPr>
-        </p:nvSpPr>
-        <p:spPr/>
-        <p:txBody>
-          <a:bodyPr/>
-          <a:lstStyle/>
-          <a:p>
-            <a:endParaRPr lang="en-US"/>
-          </a:p>
-        </p:txBody>
-      </p:sp>
-      <p:sp>
-        <p:nvSpPr>
-          <p:cNvPr id="10" name="Text Placeholder 9">
-            <a:extLst>
-              <a:ext uri="{FF2B5EF4-FFF2-40B4-BE49-F238E27FC236}">
-                <a16:creationId xmlns:a16="http://schemas.microsoft.com/office/drawing/2014/main" id="{197A0495-29FA-D827-C5DE-86533BAF5323}"/>
-              </a:ext>
-            </a:extLst>
-          </p:cNvPr>
-          <p:cNvSpPr>
-            <a:spLocks noGrp="1"/>
-          </p:cNvSpPr>
-          <p:nvPr>
-            <p:ph type="body" sz="quarter" idx="28"/>
-          </p:nvPr>
-        </p:nvSpPr>
-        <p:spPr/>
-        <p:txBody>
-          <a:bodyPr/>
-          <a:lstStyle/>
-          <a:p>
-            <a:endParaRPr lang="en-US"/>
-          </a:p>
-        </p:txBody>
-      </p:sp>
-      <p:sp>
-        <p:nvSpPr>
-          <p:cNvPr id="11" name="Content Placeholder 10">
-            <a:extLst>
-              <a:ext uri="{FF2B5EF4-FFF2-40B4-BE49-F238E27FC236}">
-                <a16:creationId xmlns:a16="http://schemas.microsoft.com/office/drawing/2014/main" id="{890B212D-404A-2DB0-E530-162FE0512E51}"/>
-              </a:ext>
-            </a:extLst>
-          </p:cNvPr>
-          <p:cNvSpPr>
-            <a:spLocks noGrp="1"/>
-          </p:cNvSpPr>
-          <p:nvPr>
-            <p:ph idx="35"/>
-          </p:nvPr>
-        </p:nvSpPr>
-        <p:spPr/>
-        <p:txBody>
-          <a:bodyPr/>
-          <a:lstStyle/>
-          <a:p>
-            <a:endParaRPr lang="en-US"/>
-          </a:p>
-        </p:txBody>
-      </p:sp>
-      <p:sp>
-        <p:nvSpPr>
-          <p:cNvPr id="12" name="Content Placeholder 11">
-            <a:extLst>
-              <a:ext uri="{FF2B5EF4-FFF2-40B4-BE49-F238E27FC236}">
-                <a16:creationId xmlns:a16="http://schemas.microsoft.com/office/drawing/2014/main" id="{8C178A25-7173-D44C-2888-E5AC8D71AF87}"/>
-              </a:ext>
-            </a:extLst>
-          </p:cNvPr>
-          <p:cNvSpPr>
-            <a:spLocks noGrp="1"/>
-          </p:cNvSpPr>
-          <p:nvPr>
-            <p:ph idx="36"/>
-          </p:nvPr>
-        </p:nvSpPr>
-        <p:spPr/>
-        <p:txBody>
-          <a:bodyPr/>
-          <a:lstStyle/>
-          <a:p>
-            <a:endParaRPr lang="en-US"/>
-          </a:p>
-        </p:txBody>
-      </p:sp>
-      <p:sp>
-        <p:nvSpPr>
-          <p:cNvPr id="13" name="Text Placeholder 12">
-            <a:extLst>
-              <a:ext uri="{FF2B5EF4-FFF2-40B4-BE49-F238E27FC236}">
-                <a16:creationId xmlns:a16="http://schemas.microsoft.com/office/drawing/2014/main" id="{F44CC01E-5E7E-D0E7-9EAF-D6128A97ADE2}"/>
-              </a:ext>
-            </a:extLst>
-          </p:cNvPr>
-          <p:cNvSpPr>
-            <a:spLocks noGrp="1"/>
-          </p:cNvSpPr>
-          <p:nvPr>
-            <p:ph type="body" sz="quarter" idx="26"/>
-          </p:nvPr>
-        </p:nvSpPr>
-        <p:spPr/>
-        <p:txBody>
-          <a:bodyPr/>
-          <a:lstStyle/>
-          <a:p>
-            <a:endParaRPr lang="en-US"/>
-          </a:p>
-        </p:txBody>
-      </p:sp>
-      <p:sp>
-        <p:nvSpPr>
-          <p:cNvPr id="14" name="Content Placeholder 13">
-            <a:extLst>
-              <a:ext uri="{FF2B5EF4-FFF2-40B4-BE49-F238E27FC236}">
-                <a16:creationId xmlns:a16="http://schemas.microsoft.com/office/drawing/2014/main" id="{0A185938-12B6-39E4-7D53-028E9CC15620}"/>
-              </a:ext>
-            </a:extLst>
-          </p:cNvPr>
-          <p:cNvSpPr>
-            <a:spLocks noGrp="1"/>
-          </p:cNvSpPr>
-          <p:nvPr>
-            <p:ph idx="32"/>
-          </p:nvPr>
-        </p:nvSpPr>
-        <p:spPr/>
-        <p:txBody>
-          <a:bodyPr/>
-          <a:lstStyle/>
-          <a:p>
-            <a:endParaRPr lang="en-US"/>
-          </a:p>
-        </p:txBody>
-      </p:sp>
-      <p:sp>
-        <p:nvSpPr>
-          <p:cNvPr id="15" name="Chart Placeholder 14">
-            <a:extLst>
-              <a:ext uri="{FF2B5EF4-FFF2-40B4-BE49-F238E27FC236}">
-                <a16:creationId xmlns:a16="http://schemas.microsoft.com/office/drawing/2014/main" id="{E643DCD1-45AD-801B-083B-8ABE0618842A}"/>
-              </a:ext>
-            </a:extLst>
-          </p:cNvPr>
-          <p:cNvSpPr>
-            <a:spLocks noGrp="1"/>
-          </p:cNvSpPr>
-          <p:nvPr>
-            <p:ph type="chart" sz="quarter" idx="37"/>
-          </p:nvPr>
-        </p:nvSpPr>
-        <p:spPr/>
-        <p:txBody>
-          <a:bodyPr/>
-          <a:lstStyle/>
-          <a:p>
-            <a:endParaRPr lang="en-US"/>
-          </a:p>
-        </p:txBody>
-      </p:sp>
-      <p:sp>
-        <p:nvSpPr>
-          <p:cNvPr id="16" name="Picture Placeholder 15">
-            <a:extLst>
-              <a:ext uri="{FF2B5EF4-FFF2-40B4-BE49-F238E27FC236}">
-                <a16:creationId xmlns:a16="http://schemas.microsoft.com/office/drawing/2014/main" id="{E3149202-894E-4D86-504B-813C3BF693A4}"/>
-              </a:ext>
-            </a:extLst>
-          </p:cNvPr>
-          <p:cNvSpPr>
-            <a:spLocks noGrp="1"/>
-          </p:cNvSpPr>
-          <p:nvPr>
-            <p:ph type="pic" sz="quarter" idx="41"/>
-          </p:nvPr>
-        </p:nvSpPr>
-        <p:spPr/>
-        <p:txBody>
-          <a:bodyPr/>
-          <a:lstStyle/>
-          <a:p>
-            <a:endParaRPr lang="en-US"/>
-          </a:p>
-        </p:txBody>
-      </p:sp>
-      <p:sp>
-        <p:nvSpPr>
-          <p:cNvPr id="17" name="Picture Placeholder 16">
-            <a:extLst>
-              <a:ext uri="{FF2B5EF4-FFF2-40B4-BE49-F238E27FC236}">
-                <a16:creationId xmlns:a16="http://schemas.microsoft.com/office/drawing/2014/main" id="{446516F8-42F9-879F-68CE-372D67F1770E}"/>
-              </a:ext>
-            </a:extLst>
-          </p:cNvPr>
-          <p:cNvSpPr>
-            <a:spLocks noGrp="1"/>
-          </p:cNvSpPr>
-          <p:nvPr>
-            <p:ph type="pic" sz="quarter" idx="42"/>
-          </p:nvPr>
-        </p:nvSpPr>
-        <p:spPr/>
-        <p:txBody>
-          <a:bodyPr/>
-          <a:lstStyle/>
-          <a:p>
-            <a:endParaRPr lang="en-US"/>
-          </a:p>
-        </p:txBody>
-      </p:sp>
-      <p:sp>
-        <p:nvSpPr>
-          <p:cNvPr id="18" name="Picture Placeholder 17">
-            <a:extLst>
-              <a:ext uri="{FF2B5EF4-FFF2-40B4-BE49-F238E27FC236}">
-                <a16:creationId xmlns:a16="http://schemas.microsoft.com/office/drawing/2014/main" id="{BA16EECE-E2B2-2364-B41A-12316D3DDC0B}"/>
-              </a:ext>
-            </a:extLst>
-          </p:cNvPr>
-          <p:cNvSpPr>
-            <a:spLocks noGrp="1"/>
-          </p:cNvSpPr>
-          <p:nvPr>
-            <p:ph type="pic" sz="quarter" idx="43"/>
-          </p:nvPr>
-        </p:nvSpPr>
-        <p:spPr/>
-        <p:txBody>
-          <a:bodyPr/>
-          <a:lstStyle/>
-          <a:p>
-            <a:endParaRPr lang="en-US"/>
-          </a:p>
-        </p:txBody>
-      </p:sp>
-      <p:sp>
-        <p:nvSpPr>
-          <p:cNvPr id="19" name="Picture Placeholder 18">
-            <a:extLst>
-              <a:ext uri="{FF2B5EF4-FFF2-40B4-BE49-F238E27FC236}">
-                <a16:creationId xmlns:a16="http://schemas.microsoft.com/office/drawing/2014/main" id="{A5791061-AC7C-AFFB-AEE6-03847156425C}"/>
-              </a:ext>
-            </a:extLst>
-          </p:cNvPr>
-          <p:cNvSpPr>
-            <a:spLocks noGrp="1"/>
-          </p:cNvSpPr>
-          <p:nvPr>
-            <p:ph type="pic" sz="quarter" idx="44"/>
-          </p:nvPr>
-        </p:nvSpPr>
-        <p:spPr/>
-        <p:txBody>
-          <a:bodyPr/>
-          <a:lstStyle/>
-          <a:p>
-            <a:endParaRPr lang="en-US"/>
-          </a:p>
-        </p:txBody>
-      </p:sp>
-      <p:sp>
-        <p:nvSpPr>
-          <p:cNvPr id="20" name="Text Placeholder 19">
-            <a:extLst>
-              <a:ext uri="{FF2B5EF4-FFF2-40B4-BE49-F238E27FC236}">
-                <a16:creationId xmlns:a16="http://schemas.microsoft.com/office/drawing/2014/main" id="{BE4A1454-8694-4609-B556-071271CED40C}"/>
-              </a:ext>
-            </a:extLst>
-          </p:cNvPr>
-          <p:cNvSpPr>
-            <a:spLocks noGrp="1"/>
-          </p:cNvSpPr>
-          <p:nvPr>
-            <p:ph type="body" sz="quarter" idx="21"/>
-          </p:nvPr>
-        </p:nvSpPr>
-        <p:spPr/>
-        <p:txBody>
-          <a:bodyPr/>
-          <a:lstStyle/>
-          <a:p>
-            <a:endParaRPr lang="en-US" dirty="0"/>
-          </a:p>
-        </p:txBody>
-      </p:sp>
-      <p:sp>
-        <p:nvSpPr>
-          <p:cNvPr id="21" name="Text Placeholder 20">
-            <a:extLst>
-              <a:ext uri="{FF2B5EF4-FFF2-40B4-BE49-F238E27FC236}">
-                <a16:creationId xmlns:a16="http://schemas.microsoft.com/office/drawing/2014/main" id="{27DCE3FC-3CE1-0479-8C72-AE3972D09B3F}"/>
-              </a:ext>
-            </a:extLst>
-          </p:cNvPr>
-          <p:cNvSpPr>
-            <a:spLocks noGrp="1"/>
-          </p:cNvSpPr>
-          <p:nvPr>
-            <p:ph type="body" sz="quarter" idx="45"/>
-          </p:nvPr>
-        </p:nvSpPr>
-        <p:spPr/>
-        <p:txBody>
-          <a:bodyPr/>
-          <a:lstStyle/>
-          <a:p>
-            <a:endParaRPr lang="en-US" sz="4800" dirty="0"/>
           </a:p>
         </p:txBody>
       </p:sp>
@@ -6002,7 +6092,33 @@
       </p:grpSpPr>
       <p:sp>
         <p:nvSpPr>
-          <p:cNvPr id="2" name="Text Placeholder 1">
+          <p:cNvPr id="17" name="Accessible slide title"/>
+          <p:cNvSpPr/>
+          <p:nvPr>
+            <p:ph type="title"/>
+          </p:nvPr>
+        </p:nvSpPr>
+        <p:spPr>
+          <a:xfrm>
+            <a:off x="0" y="-914400"/>
+            <a:ext cx="20000000" cy="457200"/>
+          </a:xfrm>
+          <a:noFill/>
+        </p:spPr>
+        <p:txBody>
+          <a:bodyPr/>
+          <a:lstStyle/>
+          <a:p>
+            <a:r>
+              <a:rPr lang="en-US" sz="2000"/>
+              <a:t>36x48 horizontal poster template — layout 3</a:t>
+            </a:r>
+          </a:p>
+        </p:txBody>
+      </p:sp>
+      <p:sp>
+        <p:nvSpPr>
+          <p:cNvPr id="2" name="Super  Kewl  Title Goes Here">
             <a:extLst>
               <a:ext uri="{FF2B5EF4-FFF2-40B4-BE49-F238E27FC236}">
                 <a16:creationId xmlns:a16="http://schemas.microsoft.com/office/drawing/2014/main" id="{2ADEFF64-0F46-674A-0CD7-5AF2D8C83475}"/>
@@ -6027,7 +6143,107 @@
       </p:sp>
       <p:sp>
         <p:nvSpPr>
-          <p:cNvPr id="3" name="Text Placeholder 2">
+          <p:cNvPr id="5" name="Highlight 1 Highlight 2 Highlight 3">
+            <a:extLst>
+              <a:ext uri="{FF2B5EF4-FFF2-40B4-BE49-F238E27FC236}">
+                <a16:creationId xmlns:a16="http://schemas.microsoft.com/office/drawing/2014/main" id="{3A70343F-0AB4-FA61-0456-3A7909B753CC}"/>
+              </a:ext>
+            </a:extLst>
+          </p:cNvPr>
+          <p:cNvSpPr>
+            <a:spLocks noGrp="1"/>
+          </p:cNvSpPr>
+          <p:nvPr>
+            <p:ph type="body" sz="quarter" idx="14"/>
+          </p:nvPr>
+        </p:nvSpPr>
+        <p:spPr/>
+        <p:txBody>
+          <a:bodyPr/>
+          <a:lstStyle/>
+          <a:p>
+            <a:endParaRPr lang="en-US"/>
+          </a:p>
+        </p:txBody>
+      </p:sp>
+      <p:sp>
+        <p:nvSpPr>
+          <p:cNvPr id="4" name="Take-home message">
+            <a:extLst>
+              <a:ext uri="{FF2B5EF4-FFF2-40B4-BE49-F238E27FC236}">
+                <a16:creationId xmlns:a16="http://schemas.microsoft.com/office/drawing/2014/main" id="{FF803F29-1F29-28DA-2249-D2EC24F3D188}"/>
+              </a:ext>
+            </a:extLst>
+          </p:cNvPr>
+          <p:cNvSpPr>
+            <a:spLocks noGrp="1"/>
+          </p:cNvSpPr>
+          <p:nvPr>
+            <p:ph type="body" sz="quarter" idx="13"/>
+          </p:nvPr>
+        </p:nvSpPr>
+        <p:spPr/>
+        <p:txBody>
+          <a:bodyPr/>
+          <a:lstStyle/>
+          <a:p>
+            <a:endParaRPr lang="en-US"/>
+          </a:p>
+        </p:txBody>
+      </p:sp>
+      <p:sp>
+        <p:nvSpPr>
+          <p:cNvPr id="16" name="Author(s)">
+            <a:extLst>
+              <a:ext uri="{FF2B5EF4-FFF2-40B4-BE49-F238E27FC236}">
+                <a16:creationId xmlns:a16="http://schemas.microsoft.com/office/drawing/2014/main" id="{B5869A5B-DD5B-6B7D-D28F-B6CBCC5BD609}"/>
+              </a:ext>
+            </a:extLst>
+          </p:cNvPr>
+          <p:cNvSpPr>
+            <a:spLocks noGrp="1"/>
+          </p:cNvSpPr>
+          <p:nvPr>
+            <p:ph type="body" sz="quarter" idx="11"/>
+          </p:nvPr>
+        </p:nvSpPr>
+        <p:spPr/>
+        <p:txBody>
+          <a:bodyPr/>
+          <a:lstStyle/>
+          <a:p>
+            <a:endParaRPr lang="en-US"/>
+          </a:p>
+        </p:txBody>
+      </p:sp>
+      <p:sp>
+        <p:nvSpPr>
+          <p:cNvPr id="15" name="Suggested boundaries for graphical abstract">
+            <a:extLst>
+              <a:ext uri="{FF2B5EF4-FFF2-40B4-BE49-F238E27FC236}">
+                <a16:creationId xmlns:a16="http://schemas.microsoft.com/office/drawing/2014/main" id="{66BD257D-9882-CB10-D54A-7890BABE0BB4}"/>
+              </a:ext>
+            </a:extLst>
+          </p:cNvPr>
+          <p:cNvSpPr>
+            <a:spLocks noGrp="1"/>
+          </p:cNvSpPr>
+          <p:nvPr>
+            <p:ph type="body" sz="quarter" idx="32"/>
+          </p:nvPr>
+        </p:nvSpPr>
+        <p:spPr/>
+        <p:txBody>
+          <a:bodyPr/>
+          <a:lstStyle/>
+          <a:p>
+            <a:endParaRPr lang="en-US"/>
+          </a:p>
+        </p:txBody>
+      </p:sp>
+      <p:sp>
+        <p:nvSpPr>
+          <p:cNvPr id="3" name="&gt; 100 words">
             <a:extLst>
               <a:ext uri="{FF2B5EF4-FFF2-40B4-BE49-F238E27FC236}">
                 <a16:creationId xmlns:a16="http://schemas.microsoft.com/office/drawing/2014/main" id="{8D51B601-4BDE-7521-5118-C6EE3A769070}"/>
@@ -6052,18 +6268,18 @@
       </p:sp>
       <p:sp>
         <p:nvSpPr>
-          <p:cNvPr id="4" name="Text Placeholder 3">
-            <a:extLst>
-              <a:ext uri="{FF2B5EF4-FFF2-40B4-BE49-F238E27FC236}">
-                <a16:creationId xmlns:a16="http://schemas.microsoft.com/office/drawing/2014/main" id="{FF803F29-1F29-28DA-2249-D2EC24F3D188}"/>
-              </a:ext>
-            </a:extLst>
-          </p:cNvPr>
-          <p:cNvSpPr>
-            <a:spLocks noGrp="1"/>
-          </p:cNvSpPr>
-          <p:nvPr>
-            <p:ph type="body" sz="quarter" idx="13"/>
+          <p:cNvPr id="6" name="Main message of Fig. 1">
+            <a:extLst>
+              <a:ext uri="{FF2B5EF4-FFF2-40B4-BE49-F238E27FC236}">
+                <a16:creationId xmlns:a16="http://schemas.microsoft.com/office/drawing/2014/main" id="{C33358E3-E504-A971-D572-DD0CD5944EFF}"/>
+              </a:ext>
+            </a:extLst>
+          </p:cNvPr>
+          <p:cNvSpPr>
+            <a:spLocks noGrp="1"/>
+          </p:cNvSpPr>
+          <p:nvPr>
+            <p:ph type="body" sz="quarter" idx="15"/>
           </p:nvPr>
         </p:nvSpPr>
         <p:spPr/>
@@ -6077,18 +6293,18 @@
       </p:sp>
       <p:sp>
         <p:nvSpPr>
-          <p:cNvPr id="5" name="Text Placeholder 4">
-            <a:extLst>
-              <a:ext uri="{FF2B5EF4-FFF2-40B4-BE49-F238E27FC236}">
-                <a16:creationId xmlns:a16="http://schemas.microsoft.com/office/drawing/2014/main" id="{3A70343F-0AB4-FA61-0456-3A7909B753CC}"/>
-              </a:ext>
-            </a:extLst>
-          </p:cNvPr>
-          <p:cNvSpPr>
-            <a:spLocks noGrp="1"/>
-          </p:cNvSpPr>
-          <p:nvPr>
-            <p:ph type="body" sz="quarter" idx="14"/>
+          <p:cNvPr id="11" name="Suggested boundaries on Figure 1">
+            <a:extLst>
+              <a:ext uri="{FF2B5EF4-FFF2-40B4-BE49-F238E27FC236}">
+                <a16:creationId xmlns:a16="http://schemas.microsoft.com/office/drawing/2014/main" id="{2C83F3BD-B420-DAA9-E64B-95F5197DE8A9}"/>
+              </a:ext>
+            </a:extLst>
+          </p:cNvPr>
+          <p:cNvSpPr>
+            <a:spLocks noGrp="1"/>
+          </p:cNvSpPr>
+          <p:nvPr>
+            <p:ph type="body" sz="quarter" idx="28"/>
           </p:nvPr>
         </p:nvSpPr>
         <p:spPr/>
@@ -6102,18 +6318,18 @@
       </p:sp>
       <p:sp>
         <p:nvSpPr>
-          <p:cNvPr id="6" name="Text Placeholder 5">
-            <a:extLst>
-              <a:ext uri="{FF2B5EF4-FFF2-40B4-BE49-F238E27FC236}">
-                <a16:creationId xmlns:a16="http://schemas.microsoft.com/office/drawing/2014/main" id="{C33358E3-E504-A971-D572-DD0CD5944EFF}"/>
-              </a:ext>
-            </a:extLst>
-          </p:cNvPr>
-          <p:cNvSpPr>
-            <a:spLocks noGrp="1"/>
-          </p:cNvSpPr>
-          <p:nvPr>
-            <p:ph type="body" sz="quarter" idx="15"/>
+          <p:cNvPr id="7" name="Main message of Fig. 3">
+            <a:extLst>
+              <a:ext uri="{FF2B5EF4-FFF2-40B4-BE49-F238E27FC236}">
+                <a16:creationId xmlns:a16="http://schemas.microsoft.com/office/drawing/2014/main" id="{CA80720E-7B1E-0CB5-9767-31C34109852D}"/>
+              </a:ext>
+            </a:extLst>
+          </p:cNvPr>
+          <p:cNvSpPr>
+            <a:spLocks noGrp="1"/>
+          </p:cNvSpPr>
+          <p:nvPr>
+            <p:ph type="body" sz="quarter" idx="16"/>
           </p:nvPr>
         </p:nvSpPr>
         <p:spPr/>
@@ -6127,18 +6343,18 @@
       </p:sp>
       <p:sp>
         <p:nvSpPr>
-          <p:cNvPr id="7" name="Text Placeholder 6">
-            <a:extLst>
-              <a:ext uri="{FF2B5EF4-FFF2-40B4-BE49-F238E27FC236}">
-                <a16:creationId xmlns:a16="http://schemas.microsoft.com/office/drawing/2014/main" id="{CA80720E-7B1E-0CB5-9767-31C34109852D}"/>
-              </a:ext>
-            </a:extLst>
-          </p:cNvPr>
-          <p:cNvSpPr>
-            <a:spLocks noGrp="1"/>
-          </p:cNvSpPr>
-          <p:nvPr>
-            <p:ph type="body" sz="quarter" idx="16"/>
+          <p:cNvPr id="13" name="Suggested boundaries on Figure 3">
+            <a:extLst>
+              <a:ext uri="{FF2B5EF4-FFF2-40B4-BE49-F238E27FC236}">
+                <a16:creationId xmlns:a16="http://schemas.microsoft.com/office/drawing/2014/main" id="{DACD3D4C-F3DE-402D-A873-A043BA069CBD}"/>
+              </a:ext>
+            </a:extLst>
+          </p:cNvPr>
+          <p:cNvSpPr>
+            <a:spLocks noGrp="1"/>
+          </p:cNvSpPr>
+          <p:nvPr>
+            <p:ph type="body" sz="quarter" idx="30"/>
           </p:nvPr>
         </p:nvSpPr>
         <p:spPr/>
@@ -6152,7 +6368,57 @@
       </p:sp>
       <p:sp>
         <p:nvSpPr>
-          <p:cNvPr id="8" name="Text Placeholder 7">
+          <p:cNvPr id="9" name="Main message of Fig. 2">
+            <a:extLst>
+              <a:ext uri="{FF2B5EF4-FFF2-40B4-BE49-F238E27FC236}">
+                <a16:creationId xmlns:a16="http://schemas.microsoft.com/office/drawing/2014/main" id="{3DB27AFE-B8B2-523E-F856-FB072E43815D}"/>
+              </a:ext>
+            </a:extLst>
+          </p:cNvPr>
+          <p:cNvSpPr>
+            <a:spLocks noGrp="1"/>
+          </p:cNvSpPr>
+          <p:nvPr>
+            <p:ph type="body" sz="quarter" idx="18"/>
+          </p:nvPr>
+        </p:nvSpPr>
+        <p:spPr/>
+        <p:txBody>
+          <a:bodyPr/>
+          <a:lstStyle/>
+          <a:p>
+            <a:endParaRPr lang="en-US"/>
+          </a:p>
+        </p:txBody>
+      </p:sp>
+      <p:sp>
+        <p:nvSpPr>
+          <p:cNvPr id="12" name="Suggested boundaries on Figure 2">
+            <a:extLst>
+              <a:ext uri="{FF2B5EF4-FFF2-40B4-BE49-F238E27FC236}">
+                <a16:creationId xmlns:a16="http://schemas.microsoft.com/office/drawing/2014/main" id="{541B4B2F-1A07-E680-5580-A9A69C0B55F6}"/>
+              </a:ext>
+            </a:extLst>
+          </p:cNvPr>
+          <p:cNvSpPr>
+            <a:spLocks noGrp="1"/>
+          </p:cNvSpPr>
+          <p:nvPr>
+            <p:ph type="body" sz="quarter" idx="29"/>
+          </p:nvPr>
+        </p:nvSpPr>
+        <p:spPr/>
+        <p:txBody>
+          <a:bodyPr/>
+          <a:lstStyle/>
+          <a:p>
+            <a:endParaRPr lang="en-US"/>
+          </a:p>
+        </p:txBody>
+      </p:sp>
+      <p:sp>
+        <p:nvSpPr>
+          <p:cNvPr id="8" name="Main message of Fig. 4">
             <a:extLst>
               <a:ext uri="{FF2B5EF4-FFF2-40B4-BE49-F238E27FC236}">
                 <a16:creationId xmlns:a16="http://schemas.microsoft.com/office/drawing/2014/main" id="{D40A0ADD-5B66-0CD3-8E46-D6334AD9FBD4}"/>
@@ -6177,18 +6443,18 @@
       </p:sp>
       <p:sp>
         <p:nvSpPr>
-          <p:cNvPr id="9" name="Text Placeholder 8">
-            <a:extLst>
-              <a:ext uri="{FF2B5EF4-FFF2-40B4-BE49-F238E27FC236}">
-                <a16:creationId xmlns:a16="http://schemas.microsoft.com/office/drawing/2014/main" id="{3DB27AFE-B8B2-523E-F856-FB072E43815D}"/>
-              </a:ext>
-            </a:extLst>
-          </p:cNvPr>
-          <p:cNvSpPr>
-            <a:spLocks noGrp="1"/>
-          </p:cNvSpPr>
-          <p:nvPr>
-            <p:ph type="body" sz="quarter" idx="18"/>
+          <p:cNvPr id="14" name="Suggested boundaries on Figure 4">
+            <a:extLst>
+              <a:ext uri="{FF2B5EF4-FFF2-40B4-BE49-F238E27FC236}">
+                <a16:creationId xmlns:a16="http://schemas.microsoft.com/office/drawing/2014/main" id="{46B31E25-3593-3C9D-5CD7-92F330F81B29}"/>
+              </a:ext>
+            </a:extLst>
+          </p:cNvPr>
+          <p:cNvSpPr>
+            <a:spLocks noGrp="1"/>
+          </p:cNvSpPr>
+          <p:nvPr>
+            <p:ph type="body" sz="quarter" idx="31"/>
           </p:nvPr>
         </p:nvSpPr>
         <p:spPr/>
@@ -6202,7 +6468,7 @@
       </p:sp>
       <p:sp>
         <p:nvSpPr>
-          <p:cNvPr id="10" name="Text Placeholder 9">
+          <p:cNvPr id="10" name="References, Funding, Acknowledgements, etc.">
             <a:extLst>
               <a:ext uri="{FF2B5EF4-FFF2-40B4-BE49-F238E27FC236}">
                 <a16:creationId xmlns:a16="http://schemas.microsoft.com/office/drawing/2014/main" id="{E04EE607-7DA0-A0CE-11AC-651FB969DDD1}"/>
@@ -6214,156 +6480,6 @@
           </p:cNvSpPr>
           <p:nvPr>
             <p:ph type="body" sz="quarter" idx="19"/>
-          </p:nvPr>
-        </p:nvSpPr>
-        <p:spPr/>
-        <p:txBody>
-          <a:bodyPr/>
-          <a:lstStyle/>
-          <a:p>
-            <a:endParaRPr lang="en-US"/>
-          </a:p>
-        </p:txBody>
-      </p:sp>
-      <p:sp>
-        <p:nvSpPr>
-          <p:cNvPr id="11" name="Text Placeholder 10">
-            <a:extLst>
-              <a:ext uri="{FF2B5EF4-FFF2-40B4-BE49-F238E27FC236}">
-                <a16:creationId xmlns:a16="http://schemas.microsoft.com/office/drawing/2014/main" id="{2C83F3BD-B420-DAA9-E64B-95F5197DE8A9}"/>
-              </a:ext>
-            </a:extLst>
-          </p:cNvPr>
-          <p:cNvSpPr>
-            <a:spLocks noGrp="1"/>
-          </p:cNvSpPr>
-          <p:nvPr>
-            <p:ph type="body" sz="quarter" idx="28"/>
-          </p:nvPr>
-        </p:nvSpPr>
-        <p:spPr/>
-        <p:txBody>
-          <a:bodyPr/>
-          <a:lstStyle/>
-          <a:p>
-            <a:endParaRPr lang="en-US"/>
-          </a:p>
-        </p:txBody>
-      </p:sp>
-      <p:sp>
-        <p:nvSpPr>
-          <p:cNvPr id="12" name="Text Placeholder 11">
-            <a:extLst>
-              <a:ext uri="{FF2B5EF4-FFF2-40B4-BE49-F238E27FC236}">
-                <a16:creationId xmlns:a16="http://schemas.microsoft.com/office/drawing/2014/main" id="{541B4B2F-1A07-E680-5580-A9A69C0B55F6}"/>
-              </a:ext>
-            </a:extLst>
-          </p:cNvPr>
-          <p:cNvSpPr>
-            <a:spLocks noGrp="1"/>
-          </p:cNvSpPr>
-          <p:nvPr>
-            <p:ph type="body" sz="quarter" idx="29"/>
-          </p:nvPr>
-        </p:nvSpPr>
-        <p:spPr/>
-        <p:txBody>
-          <a:bodyPr/>
-          <a:lstStyle/>
-          <a:p>
-            <a:endParaRPr lang="en-US"/>
-          </a:p>
-        </p:txBody>
-      </p:sp>
-      <p:sp>
-        <p:nvSpPr>
-          <p:cNvPr id="13" name="Text Placeholder 12">
-            <a:extLst>
-              <a:ext uri="{FF2B5EF4-FFF2-40B4-BE49-F238E27FC236}">
-                <a16:creationId xmlns:a16="http://schemas.microsoft.com/office/drawing/2014/main" id="{DACD3D4C-F3DE-402D-A873-A043BA069CBD}"/>
-              </a:ext>
-            </a:extLst>
-          </p:cNvPr>
-          <p:cNvSpPr>
-            <a:spLocks noGrp="1"/>
-          </p:cNvSpPr>
-          <p:nvPr>
-            <p:ph type="body" sz="quarter" idx="30"/>
-          </p:nvPr>
-        </p:nvSpPr>
-        <p:spPr/>
-        <p:txBody>
-          <a:bodyPr/>
-          <a:lstStyle/>
-          <a:p>
-            <a:endParaRPr lang="en-US"/>
-          </a:p>
-        </p:txBody>
-      </p:sp>
-      <p:sp>
-        <p:nvSpPr>
-          <p:cNvPr id="14" name="Text Placeholder 13">
-            <a:extLst>
-              <a:ext uri="{FF2B5EF4-FFF2-40B4-BE49-F238E27FC236}">
-                <a16:creationId xmlns:a16="http://schemas.microsoft.com/office/drawing/2014/main" id="{46B31E25-3593-3C9D-5CD7-92F330F81B29}"/>
-              </a:ext>
-            </a:extLst>
-          </p:cNvPr>
-          <p:cNvSpPr>
-            <a:spLocks noGrp="1"/>
-          </p:cNvSpPr>
-          <p:nvPr>
-            <p:ph type="body" sz="quarter" idx="31"/>
-          </p:nvPr>
-        </p:nvSpPr>
-        <p:spPr/>
-        <p:txBody>
-          <a:bodyPr/>
-          <a:lstStyle/>
-          <a:p>
-            <a:endParaRPr lang="en-US"/>
-          </a:p>
-        </p:txBody>
-      </p:sp>
-      <p:sp>
-        <p:nvSpPr>
-          <p:cNvPr id="15" name="Text Placeholder 14">
-            <a:extLst>
-              <a:ext uri="{FF2B5EF4-FFF2-40B4-BE49-F238E27FC236}">
-                <a16:creationId xmlns:a16="http://schemas.microsoft.com/office/drawing/2014/main" id="{66BD257D-9882-CB10-D54A-7890BABE0BB4}"/>
-              </a:ext>
-            </a:extLst>
-          </p:cNvPr>
-          <p:cNvSpPr>
-            <a:spLocks noGrp="1"/>
-          </p:cNvSpPr>
-          <p:nvPr>
-            <p:ph type="body" sz="quarter" idx="32"/>
-          </p:nvPr>
-        </p:nvSpPr>
-        <p:spPr/>
-        <p:txBody>
-          <a:bodyPr/>
-          <a:lstStyle/>
-          <a:p>
-            <a:endParaRPr lang="en-US"/>
-          </a:p>
-        </p:txBody>
-      </p:sp>
-      <p:sp>
-        <p:nvSpPr>
-          <p:cNvPr id="16" name="Text Placeholder 15">
-            <a:extLst>
-              <a:ext uri="{FF2B5EF4-FFF2-40B4-BE49-F238E27FC236}">
-                <a16:creationId xmlns:a16="http://schemas.microsoft.com/office/drawing/2014/main" id="{B5869A5B-DD5B-6B7D-D28F-B6CBCC5BD609}"/>
-              </a:ext>
-            </a:extLst>
-          </p:cNvPr>
-          <p:cNvSpPr>
-            <a:spLocks noGrp="1"/>
-          </p:cNvSpPr>
-          <p:nvPr>
-            <p:ph type="body" sz="quarter" idx="11"/>
           </p:nvPr>
         </p:nvSpPr>
         <p:spPr/>
@@ -6411,7 +6527,7 @@
         <a:srgbClr val="BCCB2A"/>
       </a:accent2>
       <a:accent3>
-        <a:srgbClr val="F58A1F"/>
+        <a:srgbClr val="9C4300"/>
       </a:accent3>
       <a:accent4>
         <a:srgbClr val="005D83"/>
